--- a/ECE1390_Lecture3.pptx
+++ b/ECE1390_Lecture3.pptx
@@ -271,7 +271,7 @@
           <a:p>
             <a:fld id="{13E9B49C-C8FD-4344-8CD3-ED4C91409D68}" type="datetimeFigureOut">
               <a:rPr lang="en-US" smtClean="0"/>
-              <a:t>8/7/24</a:t>
+              <a:t>8/14/24</a:t>
             </a:fld>
             <a:endParaRPr lang="en-US"/>
           </a:p>
@@ -469,7 +469,7 @@
           <a:p>
             <a:fld id="{13E9B49C-C8FD-4344-8CD3-ED4C91409D68}" type="datetimeFigureOut">
               <a:rPr lang="en-US" smtClean="0"/>
-              <a:t>8/7/24</a:t>
+              <a:t>8/14/24</a:t>
             </a:fld>
             <a:endParaRPr lang="en-US"/>
           </a:p>
@@ -677,7 +677,7 @@
           <a:p>
             <a:fld id="{13E9B49C-C8FD-4344-8CD3-ED4C91409D68}" type="datetimeFigureOut">
               <a:rPr lang="en-US" smtClean="0"/>
-              <a:t>8/7/24</a:t>
+              <a:t>8/14/24</a:t>
             </a:fld>
             <a:endParaRPr lang="en-US"/>
           </a:p>
@@ -875,7 +875,7 @@
           <a:p>
             <a:fld id="{13E9B49C-C8FD-4344-8CD3-ED4C91409D68}" type="datetimeFigureOut">
               <a:rPr lang="en-US" smtClean="0"/>
-              <a:t>8/7/24</a:t>
+              <a:t>8/14/24</a:t>
             </a:fld>
             <a:endParaRPr lang="en-US"/>
           </a:p>
@@ -1150,7 +1150,7 @@
           <a:p>
             <a:fld id="{13E9B49C-C8FD-4344-8CD3-ED4C91409D68}" type="datetimeFigureOut">
               <a:rPr lang="en-US" smtClean="0"/>
-              <a:t>8/7/24</a:t>
+              <a:t>8/14/24</a:t>
             </a:fld>
             <a:endParaRPr lang="en-US"/>
           </a:p>
@@ -1415,7 +1415,7 @@
           <a:p>
             <a:fld id="{13E9B49C-C8FD-4344-8CD3-ED4C91409D68}" type="datetimeFigureOut">
               <a:rPr lang="en-US" smtClean="0"/>
-              <a:t>8/7/24</a:t>
+              <a:t>8/14/24</a:t>
             </a:fld>
             <a:endParaRPr lang="en-US"/>
           </a:p>
@@ -1827,7 +1827,7 @@
           <a:p>
             <a:fld id="{13E9B49C-C8FD-4344-8CD3-ED4C91409D68}" type="datetimeFigureOut">
               <a:rPr lang="en-US" smtClean="0"/>
-              <a:t>8/7/24</a:t>
+              <a:t>8/14/24</a:t>
             </a:fld>
             <a:endParaRPr lang="en-US"/>
           </a:p>
@@ -1968,7 +1968,7 @@
           <a:p>
             <a:fld id="{13E9B49C-C8FD-4344-8CD3-ED4C91409D68}" type="datetimeFigureOut">
               <a:rPr lang="en-US" smtClean="0"/>
-              <a:t>8/7/24</a:t>
+              <a:t>8/14/24</a:t>
             </a:fld>
             <a:endParaRPr lang="en-US"/>
           </a:p>
@@ -2081,7 +2081,7 @@
           <a:p>
             <a:fld id="{13E9B49C-C8FD-4344-8CD3-ED4C91409D68}" type="datetimeFigureOut">
               <a:rPr lang="en-US" smtClean="0"/>
-              <a:t>8/7/24</a:t>
+              <a:t>8/14/24</a:t>
             </a:fld>
             <a:endParaRPr lang="en-US"/>
           </a:p>
@@ -2392,7 +2392,7 @@
           <a:p>
             <a:fld id="{13E9B49C-C8FD-4344-8CD3-ED4C91409D68}" type="datetimeFigureOut">
               <a:rPr lang="en-US" smtClean="0"/>
-              <a:t>8/7/24</a:t>
+              <a:t>8/14/24</a:t>
             </a:fld>
             <a:endParaRPr lang="en-US"/>
           </a:p>
@@ -2680,7 +2680,7 @@
           <a:p>
             <a:fld id="{13E9B49C-C8FD-4344-8CD3-ED4C91409D68}" type="datetimeFigureOut">
               <a:rPr lang="en-US" smtClean="0"/>
-              <a:t>8/7/24</a:t>
+              <a:t>8/14/24</a:t>
             </a:fld>
             <a:endParaRPr lang="en-US"/>
           </a:p>
@@ -2921,7 +2921,7 @@
           <a:p>
             <a:fld id="{13E9B49C-C8FD-4344-8CD3-ED4C91409D68}" type="datetimeFigureOut">
               <a:rPr lang="en-US" smtClean="0"/>
-              <a:t>8/7/24</a:t>
+              <a:t>8/14/24</a:t>
             </a:fld>
             <a:endParaRPr lang="en-US"/>
           </a:p>
@@ -4125,8 +4125,8 @@
           </a:prstGeom>
         </p:spPr>
       </p:pic>
-      <mc:AlternateContent xmlns:mc="http://schemas.openxmlformats.org/markup-compatibility/2006">
-        <mc:Choice xmlns:a14="http://schemas.microsoft.com/office/drawing/2010/main" Requires="a14">
+      <mc:AlternateContent xmlns:mc="http://schemas.openxmlformats.org/markup-compatibility/2006" xmlns:a14="http://schemas.microsoft.com/office/drawing/2010/main">
+        <mc:Choice Requires="a14">
           <p:sp>
             <p:nvSpPr>
               <p:cNvPr id="4" name="TextBox 3">
@@ -4155,6 +4155,7 @@
               </a:bodyPr>
               <a:lstStyle/>
               <a:p>
+                <a:pPr/>
                 <a14:m>
                   <m:oMathPara xmlns:m="http://schemas.openxmlformats.org/officeDocument/2006/math">
                     <m:oMathParaPr>
@@ -4233,7 +4234,7 @@
             </p:txBody>
           </p:sp>
         </mc:Choice>
-        <mc:Fallback>
+        <mc:Fallback xmlns="">
           <p:sp>
             <p:nvSpPr>
               <p:cNvPr id="4" name="TextBox 3">
@@ -6599,6 +6600,46 @@
           </p:txBody>
         </p:sp>
       </p:grpSp>
+      <p:sp>
+        <p:nvSpPr>
+          <p:cNvPr id="3" name="TextBox 2">
+            <a:extLst>
+              <a:ext uri="{FF2B5EF4-FFF2-40B4-BE49-F238E27FC236}">
+                <a16:creationId xmlns:a16="http://schemas.microsoft.com/office/drawing/2014/main" id="{9407A820-1522-753A-BE5B-5965FB61A182}"/>
+              </a:ext>
+            </a:extLst>
+          </p:cNvPr>
+          <p:cNvSpPr txBox="1"/>
+          <p:nvPr/>
+        </p:nvSpPr>
+        <p:spPr>
+          <a:xfrm>
+            <a:off x="9810240" y="6101142"/>
+            <a:ext cx="1839991" cy="307777"/>
+          </a:xfrm>
+          <a:prstGeom prst="rect">
+            <a:avLst/>
+          </a:prstGeom>
+          <a:noFill/>
+        </p:spPr>
+        <p:txBody>
+          <a:bodyPr wrap="none" rtlCol="0">
+            <a:spAutoFit/>
+          </a:bodyPr>
+          <a:lstStyle/>
+          <a:p>
+            <a:r>
+              <a:rPr lang="en-US" sz="1400" dirty="0"/>
+              <a:t>Image from </a:t>
+            </a:r>
+            <a:r>
+              <a:rPr lang="en-US" sz="1400" dirty="0" err="1"/>
+              <a:t>wikipedia</a:t>
+            </a:r>
+            <a:endParaRPr lang="en-US" sz="1400" dirty="0"/>
+          </a:p>
+        </p:txBody>
+      </p:sp>
     </p:spTree>
     <p:extLst>
       <p:ext uri="{BB962C8B-B14F-4D97-AF65-F5344CB8AC3E}">
@@ -7310,6 +7351,46 @@
           </p:txBody>
         </p:sp>
       </p:grpSp>
+      <p:sp>
+        <p:nvSpPr>
+          <p:cNvPr id="4" name="TextBox 3">
+            <a:extLst>
+              <a:ext uri="{FF2B5EF4-FFF2-40B4-BE49-F238E27FC236}">
+                <a16:creationId xmlns:a16="http://schemas.microsoft.com/office/drawing/2014/main" id="{9057DE1C-887C-C20D-CC80-D01671CA21CC}"/>
+              </a:ext>
+            </a:extLst>
+          </p:cNvPr>
+          <p:cNvSpPr txBox="1"/>
+          <p:nvPr/>
+        </p:nvSpPr>
+        <p:spPr>
+          <a:xfrm>
+            <a:off x="9810240" y="6101142"/>
+            <a:ext cx="1839991" cy="307777"/>
+          </a:xfrm>
+          <a:prstGeom prst="rect">
+            <a:avLst/>
+          </a:prstGeom>
+          <a:noFill/>
+        </p:spPr>
+        <p:txBody>
+          <a:bodyPr wrap="none" rtlCol="0">
+            <a:spAutoFit/>
+          </a:bodyPr>
+          <a:lstStyle/>
+          <a:p>
+            <a:r>
+              <a:rPr lang="en-US" sz="1400" dirty="0"/>
+              <a:t>Image from </a:t>
+            </a:r>
+            <a:r>
+              <a:rPr lang="en-US" sz="1400" dirty="0" err="1"/>
+              <a:t>wikipedia</a:t>
+            </a:r>
+            <a:endParaRPr lang="en-US" sz="1400" dirty="0"/>
+          </a:p>
+        </p:txBody>
+      </p:sp>
     </p:spTree>
     <p:extLst>
       <p:ext uri="{BB962C8B-B14F-4D97-AF65-F5344CB8AC3E}">
@@ -7803,6 +7884,46 @@
               </a:rPr>
               <a:t>)</a:t>
             </a:r>
+          </a:p>
+        </p:txBody>
+      </p:sp>
+      <p:sp>
+        <p:nvSpPr>
+          <p:cNvPr id="2" name="TextBox 1">
+            <a:extLst>
+              <a:ext uri="{FF2B5EF4-FFF2-40B4-BE49-F238E27FC236}">
+                <a16:creationId xmlns:a16="http://schemas.microsoft.com/office/drawing/2014/main" id="{A3811E6D-89F9-1C9B-C727-EFB21450C843}"/>
+              </a:ext>
+            </a:extLst>
+          </p:cNvPr>
+          <p:cNvSpPr txBox="1"/>
+          <p:nvPr/>
+        </p:nvSpPr>
+        <p:spPr>
+          <a:xfrm>
+            <a:off x="9878596" y="6564208"/>
+            <a:ext cx="1944507" cy="307777"/>
+          </a:xfrm>
+          <a:prstGeom prst="rect">
+            <a:avLst/>
+          </a:prstGeom>
+          <a:noFill/>
+        </p:spPr>
+        <p:txBody>
+          <a:bodyPr wrap="none" rtlCol="0">
+            <a:spAutoFit/>
+          </a:bodyPr>
+          <a:lstStyle/>
+          <a:p>
+            <a:r>
+              <a:rPr lang="en-US" sz="1400" dirty="0"/>
+              <a:t>Image from </a:t>
+            </a:r>
+            <a:r>
+              <a:rPr lang="en-US" sz="1400" dirty="0" err="1"/>
+              <a:t>opencv.org</a:t>
+            </a:r>
+            <a:endParaRPr lang="en-US" sz="1400" dirty="0"/>
           </a:p>
         </p:txBody>
       </p:sp>

--- a/ECE1390_Lecture3.pptx
+++ b/ECE1390_Lecture3.pptx
@@ -271,7 +271,7 @@
           <a:p>
             <a:fld id="{13E9B49C-C8FD-4344-8CD3-ED4C91409D68}" type="datetimeFigureOut">
               <a:rPr lang="en-US" smtClean="0"/>
-              <a:t>8/14/24</a:t>
+              <a:t>8/24/24</a:t>
             </a:fld>
             <a:endParaRPr lang="en-US"/>
           </a:p>
@@ -469,7 +469,7 @@
           <a:p>
             <a:fld id="{13E9B49C-C8FD-4344-8CD3-ED4C91409D68}" type="datetimeFigureOut">
               <a:rPr lang="en-US" smtClean="0"/>
-              <a:t>8/14/24</a:t>
+              <a:t>8/24/24</a:t>
             </a:fld>
             <a:endParaRPr lang="en-US"/>
           </a:p>
@@ -677,7 +677,7 @@
           <a:p>
             <a:fld id="{13E9B49C-C8FD-4344-8CD3-ED4C91409D68}" type="datetimeFigureOut">
               <a:rPr lang="en-US" smtClean="0"/>
-              <a:t>8/14/24</a:t>
+              <a:t>8/24/24</a:t>
             </a:fld>
             <a:endParaRPr lang="en-US"/>
           </a:p>
@@ -875,7 +875,7 @@
           <a:p>
             <a:fld id="{13E9B49C-C8FD-4344-8CD3-ED4C91409D68}" type="datetimeFigureOut">
               <a:rPr lang="en-US" smtClean="0"/>
-              <a:t>8/14/24</a:t>
+              <a:t>8/24/24</a:t>
             </a:fld>
             <a:endParaRPr lang="en-US"/>
           </a:p>
@@ -1150,7 +1150,7 @@
           <a:p>
             <a:fld id="{13E9B49C-C8FD-4344-8CD3-ED4C91409D68}" type="datetimeFigureOut">
               <a:rPr lang="en-US" smtClean="0"/>
-              <a:t>8/14/24</a:t>
+              <a:t>8/24/24</a:t>
             </a:fld>
             <a:endParaRPr lang="en-US"/>
           </a:p>
@@ -1415,7 +1415,7 @@
           <a:p>
             <a:fld id="{13E9B49C-C8FD-4344-8CD3-ED4C91409D68}" type="datetimeFigureOut">
               <a:rPr lang="en-US" smtClean="0"/>
-              <a:t>8/14/24</a:t>
+              <a:t>8/24/24</a:t>
             </a:fld>
             <a:endParaRPr lang="en-US"/>
           </a:p>
@@ -1827,7 +1827,7 @@
           <a:p>
             <a:fld id="{13E9B49C-C8FD-4344-8CD3-ED4C91409D68}" type="datetimeFigureOut">
               <a:rPr lang="en-US" smtClean="0"/>
-              <a:t>8/14/24</a:t>
+              <a:t>8/24/24</a:t>
             </a:fld>
             <a:endParaRPr lang="en-US"/>
           </a:p>
@@ -1968,7 +1968,7 @@
           <a:p>
             <a:fld id="{13E9B49C-C8FD-4344-8CD3-ED4C91409D68}" type="datetimeFigureOut">
               <a:rPr lang="en-US" smtClean="0"/>
-              <a:t>8/14/24</a:t>
+              <a:t>8/24/24</a:t>
             </a:fld>
             <a:endParaRPr lang="en-US"/>
           </a:p>
@@ -2081,7 +2081,7 @@
           <a:p>
             <a:fld id="{13E9B49C-C8FD-4344-8CD3-ED4C91409D68}" type="datetimeFigureOut">
               <a:rPr lang="en-US" smtClean="0"/>
-              <a:t>8/14/24</a:t>
+              <a:t>8/24/24</a:t>
             </a:fld>
             <a:endParaRPr lang="en-US"/>
           </a:p>
@@ -2392,7 +2392,7 @@
           <a:p>
             <a:fld id="{13E9B49C-C8FD-4344-8CD3-ED4C91409D68}" type="datetimeFigureOut">
               <a:rPr lang="en-US" smtClean="0"/>
-              <a:t>8/14/24</a:t>
+              <a:t>8/24/24</a:t>
             </a:fld>
             <a:endParaRPr lang="en-US"/>
           </a:p>
@@ -2680,7 +2680,7 @@
           <a:p>
             <a:fld id="{13E9B49C-C8FD-4344-8CD3-ED4C91409D68}" type="datetimeFigureOut">
               <a:rPr lang="en-US" smtClean="0"/>
-              <a:t>8/14/24</a:t>
+              <a:t>8/24/24</a:t>
             </a:fld>
             <a:endParaRPr lang="en-US"/>
           </a:p>
@@ -2921,7 +2921,7 @@
           <a:p>
             <a:fld id="{13E9B49C-C8FD-4344-8CD3-ED4C91409D68}" type="datetimeFigureOut">
               <a:rPr lang="en-US" smtClean="0"/>
-              <a:t>8/14/24</a:t>
+              <a:t>8/24/24</a:t>
             </a:fld>
             <a:endParaRPr lang="en-US"/>
           </a:p>
@@ -3669,6 +3669,36 @@
           </a:p>
         </p:txBody>
       </p:sp>
+      <p:pic>
+        <p:nvPicPr>
+          <p:cNvPr id="5" name="Picture 4">
+            <a:extLst>
+              <a:ext uri="{FF2B5EF4-FFF2-40B4-BE49-F238E27FC236}">
+                <a16:creationId xmlns:a16="http://schemas.microsoft.com/office/drawing/2014/main" id="{781639AE-D331-7965-55C6-424320D52380}"/>
+              </a:ext>
+            </a:extLst>
+          </p:cNvPr>
+          <p:cNvPicPr>
+            <a:picLocks noChangeAspect="1"/>
+          </p:cNvPicPr>
+          <p:nvPr/>
+        </p:nvPicPr>
+        <p:blipFill>
+          <a:blip r:embed="rId2"/>
+          <a:stretch>
+            <a:fillRect/>
+          </a:stretch>
+        </p:blipFill>
+        <p:spPr>
+          <a:xfrm>
+            <a:off x="4349749" y="3227146"/>
+            <a:ext cx="3981451" cy="3368920"/>
+          </a:xfrm>
+          <a:prstGeom prst="rect">
+            <a:avLst/>
+          </a:prstGeom>
+        </p:spPr>
+      </p:pic>
     </p:spTree>
     <p:extLst>
       <p:ext uri="{BB962C8B-B14F-4D97-AF65-F5344CB8AC3E}">
